--- a/Диплом.pptx
+++ b/Диплом.pptx
@@ -18,7 +18,7 @@
   <p:notesSz cx="6858000" cy="9144000"/>
   <p:embeddedFontLst>
     <p:embeddedFont>
-      <p:font typeface="IBM Plex Mono" panose="020B0604020202020204" charset="-52"/>
+      <p:font typeface="Calibri" panose="020F0502020204030204" pitchFamily="34" charset="0"/>
       <p:regular r:id="rId8"/>
       <p:bold r:id="rId9"/>
       <p:italic r:id="rId10"/>
@@ -32,14 +32,14 @@
       <p:boldItalic r:id="rId15"/>
     </p:embeddedFont>
     <p:embeddedFont>
-      <p:font typeface="Poppins" panose="020B0604020202020204" charset="0"/>
+      <p:font typeface="IBM Plex Mono" panose="020B0604020202020204" charset="-52"/>
       <p:regular r:id="rId16"/>
       <p:bold r:id="rId17"/>
       <p:italic r:id="rId18"/>
       <p:boldItalic r:id="rId19"/>
     </p:embeddedFont>
     <p:embeddedFont>
-      <p:font typeface="Calibri" panose="020F0502020204030204" pitchFamily="34" charset="0"/>
+      <p:font typeface="Poppins" panose="020B0604020202020204" charset="0"/>
       <p:regular r:id="rId20"/>
       <p:bold r:id="rId21"/>
       <p:italic r:id="rId22"/>
@@ -37589,11 +37589,6 @@
               </a:rPr>
               <a:t>09.02.07 «Информационные системы и программирование»</a:t>
             </a:r>
-            <a:endParaRPr lang="ru-RU" sz="1400" dirty="0">
-              <a:latin typeface="Calibri" panose="020F0502020204030204" pitchFamily="34" charset="0"/>
-              <a:ea typeface="Calibri" panose="020F0502020204030204" pitchFamily="34" charset="0"/>
-              <a:cs typeface="Calibri" panose="020F0502020204030204" pitchFamily="34" charset="0"/>
-            </a:endParaRPr>
           </a:p>
         </p:txBody>
       </p:sp>
@@ -38884,8 +38879,8 @@
         </p:nvSpPr>
         <p:spPr>
           <a:xfrm>
-            <a:off x="6143398" y="3612492"/>
-            <a:ext cx="2378398" cy="1400358"/>
+            <a:off x="5914210" y="3612492"/>
+            <a:ext cx="2588666" cy="1400358"/>
           </a:xfrm>
           <a:prstGeom prst="rect">
             <a:avLst/>
@@ -39176,8 +39171,29 @@
                 <a:ea typeface="Calibri" panose="020F0502020204030204" pitchFamily="34" charset="0"/>
                 <a:cs typeface="Calibri" panose="020F0502020204030204" pitchFamily="34" charset="0"/>
               </a:rPr>
-              <a:t> Кузнецов А.О.</a:t>
+              <a:t> Кузнецов </a:t>
             </a:r>
+            <a:r>
+              <a:rPr lang="ru-RU" sz="1400" dirty="0" smtClean="0">
+                <a:latin typeface="Calibri" panose="020F0502020204030204" pitchFamily="34" charset="0"/>
+                <a:ea typeface="Calibri" panose="020F0502020204030204" pitchFamily="34" charset="0"/>
+                <a:cs typeface="Calibri" panose="020F0502020204030204" pitchFamily="34" charset="0"/>
+              </a:rPr>
+              <a:t>А</a:t>
+            </a:r>
+            <a:r>
+              <a:rPr lang="ru-RU" sz="1400" dirty="0" smtClean="0">
+                <a:latin typeface="Calibri" panose="020F0502020204030204" pitchFamily="34" charset="0"/>
+                <a:ea typeface="Calibri" panose="020F0502020204030204" pitchFamily="34" charset="0"/>
+                <a:cs typeface="Calibri" panose="020F0502020204030204" pitchFamily="34" charset="0"/>
+              </a:rPr>
+              <a:t>рсений Олегович</a:t>
+            </a:r>
+            <a:endParaRPr lang="ru-RU" sz="1400" dirty="0">
+              <a:latin typeface="Calibri" panose="020F0502020204030204" pitchFamily="34" charset="0"/>
+              <a:ea typeface="Calibri" panose="020F0502020204030204" pitchFamily="34" charset="0"/>
+              <a:cs typeface="Calibri" panose="020F0502020204030204" pitchFamily="34" charset="0"/>
+            </a:endParaRPr>
           </a:p>
           <a:p>
             <a:pPr algn="r"/>
@@ -43128,7 +43144,7 @@
             <p:ph type="pic" idx="7"/>
           </p:nvPr>
         </p:nvPicPr>
-        <p:blipFill rotWithShape="1">
+        <p:blipFill>
           <a:blip r:embed="rId3">
             <a:extLst>
               <a:ext uri="{28A0092B-C50C-407E-A947-70E740481C1C}">
@@ -43136,13 +43152,14 @@
               </a:ext>
             </a:extLst>
           </a:blip>
-          <a:srcRect l="-1" r="453"/>
-          <a:stretch/>
+          <a:stretch>
+            <a:fillRect/>
+          </a:stretch>
         </p:blipFill>
         <p:spPr>
           <a:xfrm>
-            <a:off x="94539" y="750267"/>
-            <a:ext cx="3926403" cy="3900014"/>
+            <a:off x="96960" y="750267"/>
+            <a:ext cx="3921561" cy="3900014"/>
           </a:xfrm>
           <a:prstGeom prst="rect">
             <a:avLst/>
